--- a/Unidad 4/Actividad 4.3 Banco de Ejercicios_CynthiaMorales_6ISCM.pptx
+++ b/Unidad 4/Actividad 4.3 Banco de Ejercicios_CynthiaMorales_6ISCM.pptx
@@ -113,6 +113,11 @@
       </a:defRPr>
     </a:lvl9pPr>
   </p:defaultTextStyle>
+  <p:extLst>
+    <p:ext uri="{EFAFB233-063F-42B5-8137-9DF3F51BA10A}">
+      <p15:sldGuideLst xmlns:p15="http://schemas.microsoft.com/office/powerpoint/2012/main"/>
+    </p:ext>
+  </p:extLst>
 </p:presentation>
 </file>
 
@@ -3719,7 +3724,7 @@
                 <a:cs typeface="Glacial Indifference"/>
                 <a:sym typeface="Glacial Indifference"/>
               </a:rPr>
-              <a:t> Frontera Comalapa, Chiapas. A 29 de Mayo del 2026</a:t>
+              <a:t> Frontera Comalapa, Chiapas. A 02 de Junio del 2026</a:t>
             </a:r>
           </a:p>
         </p:txBody>
